--- a/output/05-security-privacy/05-04-data-protection-basics.pptx
+++ b/output/05-security-privacy/05-04-data-protection-basics.pptx
@@ -6674,7 +6674,7 @@
                 </a:solidFill>
                 <a:latin typeface="Segoe UI"/>
               </a:rPr>
-              <a:t>Same day, to the named contact, with what you know.</a:t>
+              <a:t>Same day, through the company's designated incident-reporting process, with what you know.</a:t>
             </a:r>
           </a:p>
         </p:txBody>
